--- a/プレゼンテーション1.pptx
+++ b/プレゼンテーション1.pptx
@@ -267,7 +267,7 @@
           <a:p>
             <a:fld id="{C97A6AC7-E8A8-40CF-860E-092418A0F7B7}" type="datetimeFigureOut">
               <a:rPr kumimoji="1" lang="ja-JP" altLang="en-US" smtClean="0"/>
-              <a:t>2026/4/24</a:t>
+              <a:t>2026/5/15</a:t>
             </a:fld>
             <a:endParaRPr kumimoji="1" lang="ja-JP" altLang="en-US"/>
           </a:p>
@@ -497,7 +497,7 @@
           <a:p>
             <a:fld id="{C97A6AC7-E8A8-40CF-860E-092418A0F7B7}" type="datetimeFigureOut">
               <a:rPr kumimoji="1" lang="ja-JP" altLang="en-US" smtClean="0"/>
-              <a:t>2026/4/24</a:t>
+              <a:t>2026/5/15</a:t>
             </a:fld>
             <a:endParaRPr kumimoji="1" lang="ja-JP" altLang="en-US"/>
           </a:p>
@@ -737,7 +737,7 @@
           <a:p>
             <a:fld id="{C97A6AC7-E8A8-40CF-860E-092418A0F7B7}" type="datetimeFigureOut">
               <a:rPr kumimoji="1" lang="ja-JP" altLang="en-US" smtClean="0"/>
-              <a:t>2026/4/24</a:t>
+              <a:t>2026/5/15</a:t>
             </a:fld>
             <a:endParaRPr kumimoji="1" lang="ja-JP" altLang="en-US"/>
           </a:p>
@@ -967,7 +967,7 @@
           <a:p>
             <a:fld id="{C97A6AC7-E8A8-40CF-860E-092418A0F7B7}" type="datetimeFigureOut">
               <a:rPr kumimoji="1" lang="ja-JP" altLang="en-US" smtClean="0"/>
-              <a:t>2026/4/24</a:t>
+              <a:t>2026/5/15</a:t>
             </a:fld>
             <a:endParaRPr kumimoji="1" lang="ja-JP" altLang="en-US"/>
           </a:p>
@@ -1242,7 +1242,7 @@
           <a:p>
             <a:fld id="{C97A6AC7-E8A8-40CF-860E-092418A0F7B7}" type="datetimeFigureOut">
               <a:rPr kumimoji="1" lang="ja-JP" altLang="en-US" smtClean="0"/>
-              <a:t>2026/4/24</a:t>
+              <a:t>2026/5/15</a:t>
             </a:fld>
             <a:endParaRPr kumimoji="1" lang="ja-JP" altLang="en-US"/>
           </a:p>
@@ -1571,7 +1571,7 @@
           <a:p>
             <a:fld id="{C97A6AC7-E8A8-40CF-860E-092418A0F7B7}" type="datetimeFigureOut">
               <a:rPr kumimoji="1" lang="ja-JP" altLang="en-US" smtClean="0"/>
-              <a:t>2026/4/24</a:t>
+              <a:t>2026/5/15</a:t>
             </a:fld>
             <a:endParaRPr kumimoji="1" lang="ja-JP" altLang="en-US"/>
           </a:p>
@@ -2047,7 +2047,7 @@
           <a:p>
             <a:fld id="{C97A6AC7-E8A8-40CF-860E-092418A0F7B7}" type="datetimeFigureOut">
               <a:rPr kumimoji="1" lang="ja-JP" altLang="en-US" smtClean="0"/>
-              <a:t>2026/4/24</a:t>
+              <a:t>2026/5/15</a:t>
             </a:fld>
             <a:endParaRPr kumimoji="1" lang="ja-JP" altLang="en-US"/>
           </a:p>
@@ -2188,7 +2188,7 @@
           <a:p>
             <a:fld id="{C97A6AC7-E8A8-40CF-860E-092418A0F7B7}" type="datetimeFigureOut">
               <a:rPr kumimoji="1" lang="ja-JP" altLang="en-US" smtClean="0"/>
-              <a:t>2026/4/24</a:t>
+              <a:t>2026/5/15</a:t>
             </a:fld>
             <a:endParaRPr kumimoji="1" lang="ja-JP" altLang="en-US"/>
           </a:p>
@@ -2301,7 +2301,7 @@
           <a:p>
             <a:fld id="{C97A6AC7-E8A8-40CF-860E-092418A0F7B7}" type="datetimeFigureOut">
               <a:rPr kumimoji="1" lang="ja-JP" altLang="en-US" smtClean="0"/>
-              <a:t>2026/4/24</a:t>
+              <a:t>2026/5/15</a:t>
             </a:fld>
             <a:endParaRPr kumimoji="1" lang="ja-JP" altLang="en-US"/>
           </a:p>
@@ -2644,7 +2644,7 @@
           <a:p>
             <a:fld id="{C97A6AC7-E8A8-40CF-860E-092418A0F7B7}" type="datetimeFigureOut">
               <a:rPr kumimoji="1" lang="ja-JP" altLang="en-US" smtClean="0"/>
-              <a:t>2026/4/24</a:t>
+              <a:t>2026/5/15</a:t>
             </a:fld>
             <a:endParaRPr kumimoji="1" lang="ja-JP" altLang="en-US"/>
           </a:p>
@@ -2932,7 +2932,7 @@
           <a:p>
             <a:fld id="{C97A6AC7-E8A8-40CF-860E-092418A0F7B7}" type="datetimeFigureOut">
               <a:rPr kumimoji="1" lang="ja-JP" altLang="en-US" smtClean="0"/>
-              <a:t>2026/4/24</a:t>
+              <a:t>2026/5/15</a:t>
             </a:fld>
             <a:endParaRPr kumimoji="1" lang="ja-JP" altLang="en-US"/>
           </a:p>
@@ -3205,7 +3205,7 @@
           <a:p>
             <a:fld id="{C97A6AC7-E8A8-40CF-860E-092418A0F7B7}" type="datetimeFigureOut">
               <a:rPr kumimoji="1" lang="ja-JP" altLang="en-US" smtClean="0"/>
-              <a:t>2026/4/24</a:t>
+              <a:t>2026/5/15</a:t>
             </a:fld>
             <a:endParaRPr kumimoji="1" lang="ja-JP" altLang="en-US"/>
           </a:p>
@@ -4022,21 +4022,21 @@
           <a:p>
             <a:r>
               <a:rPr kumimoji="1" lang="ja-JP" altLang="en-US" b="1" dirty="0"/>
-              <a:t>・ジャンプするところに透明ブロック　頭ぶつける的な</a:t>
+              <a:t>・✓ジャンプするところに透明ブロック　頭ぶつける的な</a:t>
             </a:r>
             <a:endParaRPr lang="en-US" altLang="ja-JP" b="1" dirty="0"/>
           </a:p>
           <a:p>
             <a:r>
               <a:rPr lang="ja-JP" altLang="en-US" b="1" dirty="0"/>
-              <a:t>・バネに乗ったら頭上に棘</a:t>
+              <a:t>・✓バネに乗ったら頭上に棘</a:t>
             </a:r>
             <a:endParaRPr lang="en-US" altLang="ja-JP" b="1" dirty="0"/>
           </a:p>
           <a:p>
             <a:r>
               <a:rPr lang="ja-JP" altLang="en-US" b="1" dirty="0"/>
-              <a:t>・ジャンプ強要、上塞ぐ　透明ブロック、足元のブロックが下がっていずれ落下死</a:t>
+              <a:t>・ジャンプ強要、✓上塞ぐ　✓透明ブロック、✓足元のブロックが下がっていずれ落下死</a:t>
             </a:r>
             <a:endParaRPr lang="en-US" altLang="ja-JP" b="1" dirty="0"/>
           </a:p>
@@ -4050,14 +4050,14 @@
           <a:p>
             <a:r>
               <a:rPr lang="ja-JP" altLang="en-US" b="1" dirty="0"/>
-              <a:t>・パワーアップアイテムと思ったら即死アイテム</a:t>
+              <a:t>・✓パワーアップアイテムと思ったら即死アイテム</a:t>
             </a:r>
             <a:endParaRPr lang="en-US" altLang="ja-JP" b="1" dirty="0"/>
           </a:p>
           <a:p>
             <a:r>
               <a:rPr kumimoji="1" lang="ja-JP" altLang="en-US" b="1" dirty="0"/>
-              <a:t>・床が急に落ちる</a:t>
+              <a:t>・✓床が急に落ちる</a:t>
             </a:r>
             <a:endParaRPr kumimoji="1" lang="en-US" altLang="ja-JP" b="1" dirty="0"/>
           </a:p>
